--- a/task133/golden/board_ecl_q3_2026.pptx
+++ b/task133/golden/board_ecl_q3_2026.pptx
@@ -115,8 +115,8 @@
     <c:autoTitleDeleted val="0"/>
     <c:plotArea>
       <c:barChart>
-        <c:barDir val="col"/>
-        <c:grouping val="clustered"/>
+        <c:barDir val="bar"/>
+        <c:grouping val="percentStacked"/>
         <c:ser>
           <c:idx val="0"/>
           <c:order val="0"/>
@@ -126,17 +126,47 @@
               <c:strCache>
                 <c:ptCount val="1"/>
                 <c:pt idx="0">
-                  <c:v>PL36</c:v>
+                  <c:v>Stage 1 at 30 September</c:v>
                 </c:pt>
               </c:strCache>
             </c:strRef>
           </c:tx>
           <c:spPr>
             <a:solidFill>
-              <a:srgbClr val="2E6F73"/>
+              <a:srgbClr val="2A78D6"/>
             </a:solidFill>
+            <a:ln w="19050">
+              <a:solidFill>
+                <a:srgbClr val="FFFFFF"/>
+              </a:solidFill>
+            </a:ln>
           </c:spPr>
           <c:dLbls>
+            <c:dLbl>
+              <c:idx val="0"/>
+              <c:tx>
+                <c:rich>
+                  <a:bodyPr/>
+                  <a:lstStyle/>
+                  <a:p>
+                    <a:r>
+                      <a:rPr sz="1100" b="1">
+                        <a:solidFill>
+                          <a:srgbClr val="FFFFFF"/>
+                        </a:solidFill>
+                      </a:rPr>
+                      <a:t>14,470</a:t>
+                    </a:r>
+                  </a:p>
+                </c:rich>
+              </c:tx>
+              <c:showLegendKey val="0"/>
+              <c:showVal val="1"/>
+              <c:showCatName val="0"/>
+              <c:showSerName val="0"/>
+              <c:showPercent val="0"/>
+              <c:showBubbleSize val="0"/>
+            </c:dLbl>
             <c:dLbl>
               <c:idx val="1"/>
               <c:tx>
@@ -145,12 +175,12 @@
                   <a:lstStyle/>
                   <a:p>
                     <a:r>
-                      <a:rPr sz="1000">
+                      <a:rPr sz="1100" b="1">
                         <a:solidFill>
-                          <a:srgbClr val="1E2B3C"/>
+                          <a:srgbClr val="FFFFFF"/>
                         </a:solidFill>
                       </a:rPr>
-                      <a:t>$0.2m</a:t>
+                      <a:t>468</a:t>
                     </a:r>
                   </a:p>
                 </c:rich>
@@ -170,12 +200,12 @@
                   <a:lstStyle/>
                   <a:p>
                     <a:r>
-                      <a:rPr sz="1000">
+                      <a:rPr sz="1100" b="1">
                         <a:solidFill>
-                          <a:srgbClr val="1E2B3C"/>
+                          <a:srgbClr val="FFFFFF"/>
                         </a:solidFill>
                       </a:rPr>
-                      <a:t>$0.9m</a:t>
+                      <a:t>17,724</a:t>
                     </a:r>
                   </a:p>
                 </c:rich>
@@ -195,12 +225,12 @@
                   <a:lstStyle/>
                   <a:p>
                     <a:r>
-                      <a:rPr sz="1000">
+                      <a:rPr sz="1100" b="1">
                         <a:solidFill>
-                          <a:srgbClr val="1E2B3C"/>
+                          <a:srgbClr val="FFFFFF"/>
                         </a:solidFill>
                       </a:rPr>
-                      <a:t>$2.8m</a:t>
+                      <a:t>560</a:t>
                     </a:r>
                   </a:p>
                 </c:rich>
@@ -226,16 +256,16 @@
               <c:strCache>
                 <c:ptCount val="4"/>
                 <c:pt idx="0">
-                  <c:v>2023 and earlier</c:v>
+                  <c:v>PL36, stage 1 at 30 June</c:v>
                 </c:pt>
                 <c:pt idx="1">
-                  <c:v>2024</c:v>
+                  <c:v>PL36, stage 2 at 30 June</c:v>
                 </c:pt>
                 <c:pt idx="2">
-                  <c:v>2025</c:v>
+                  <c:v>PL60, stage 1 at 30 June</c:v>
                 </c:pt>
                 <c:pt idx="3">
-                  <c:v>2026</c:v>
+                  <c:v>PL60, stage 2 at 30 June</c:v>
                 </c:pt>
               </c:strCache>
             </c:strRef>
@@ -247,16 +277,16 @@
                 <c:formatCode>General</c:formatCode>
                 <c:ptCount val="4"/>
                 <c:pt idx="0">
-                  <c:v>0.005</c:v>
+                  <c:v>14470</c:v>
                 </c:pt>
                 <c:pt idx="1">
-                  <c:v>0.159</c:v>
+                  <c:v>468</c:v>
                 </c:pt>
                 <c:pt idx="2">
-                  <c:v>0.94</c:v>
+                  <c:v>17724</c:v>
                 </c:pt>
                 <c:pt idx="3">
-                  <c:v>2.779</c:v>
+                  <c:v>560</c:v>
                 </c:pt>
               </c:numCache>
             </c:numRef>
@@ -271,15 +301,20 @@
               <c:strCache>
                 <c:ptCount val="1"/>
                 <c:pt idx="0">
-                  <c:v>PL60</c:v>
+                  <c:v>Stage 2</c:v>
                 </c:pt>
               </c:strCache>
             </c:strRef>
           </c:tx>
           <c:spPr>
             <a:solidFill>
-              <a:srgbClr val="C9A25F"/>
+              <a:srgbClr val="EDA100"/>
             </a:solidFill>
+            <a:ln w="19050">
+              <a:solidFill>
+                <a:srgbClr val="FFFFFF"/>
+              </a:solidFill>
+            </a:ln>
           </c:spPr>
           <c:dLbls>
             <c:dLbl>
@@ -290,12 +325,12 @@
                   <a:lstStyle/>
                   <a:p>
                     <a:r>
-                      <a:rPr sz="1000">
+                      <a:rPr sz="1100" b="1">
                         <a:solidFill>
                           <a:srgbClr val="1E2B3C"/>
                         </a:solidFill>
                       </a:rPr>
-                      <a:t>$0.6m</a:t>
+                      <a:t>680</a:t>
                     </a:r>
                   </a:p>
                 </c:rich>
@@ -315,12 +350,12 @@
                   <a:lstStyle/>
                   <a:p>
                     <a:r>
-                      <a:rPr sz="1000">
+                      <a:rPr sz="1100" b="1">
                         <a:solidFill>
                           <a:srgbClr val="1E2B3C"/>
                         </a:solidFill>
                       </a:rPr>
-                      <a:t>$1.1m</a:t>
+                      <a:t>658</a:t>
                     </a:r>
                   </a:p>
                 </c:rich>
@@ -340,12 +375,12 @@
                   <a:lstStyle/>
                   <a:p>
                     <a:r>
-                      <a:rPr sz="1000">
+                      <a:rPr sz="1100" b="1">
                         <a:solidFill>
                           <a:srgbClr val="1E2B3C"/>
                         </a:solidFill>
                       </a:rPr>
-                      <a:t>$2.4m</a:t>
+                      <a:t>831</a:t>
                     </a:r>
                   </a:p>
                 </c:rich>
@@ -365,12 +400,12 @@
                   <a:lstStyle/>
                   <a:p>
                     <a:r>
-                      <a:rPr sz="1000">
+                      <a:rPr sz="1100" b="1">
                         <a:solidFill>
                           <a:srgbClr val="1E2B3C"/>
                         </a:solidFill>
                       </a:rPr>
-                      <a:t>$5.8m</a:t>
+                      <a:t>942</a:t>
                     </a:r>
                   </a:p>
                 </c:rich>
@@ -396,16 +431,16 @@
               <c:strCache>
                 <c:ptCount val="4"/>
                 <c:pt idx="0">
-                  <c:v>2023 and earlier</c:v>
+                  <c:v>PL36, stage 1 at 30 June</c:v>
                 </c:pt>
                 <c:pt idx="1">
-                  <c:v>2024</c:v>
+                  <c:v>PL36, stage 2 at 30 June</c:v>
                 </c:pt>
                 <c:pt idx="2">
-                  <c:v>2025</c:v>
+                  <c:v>PL60, stage 1 at 30 June</c:v>
                 </c:pt>
                 <c:pt idx="3">
-                  <c:v>2026</c:v>
+                  <c:v>PL60, stage 2 at 30 June</c:v>
                 </c:pt>
               </c:strCache>
             </c:strRef>
@@ -417,31 +452,397 @@
                 <c:formatCode>General</c:formatCode>
                 <c:ptCount val="4"/>
                 <c:pt idx="0">
-                  <c:v>0.641</c:v>
+                  <c:v>680</c:v>
                 </c:pt>
                 <c:pt idx="1">
-                  <c:v>1.073</c:v>
+                  <c:v>658</c:v>
                 </c:pt>
                 <c:pt idx="2">
-                  <c:v>2.412</c:v>
+                  <c:v>831</c:v>
                 </c:pt>
                 <c:pt idx="3">
-                  <c:v>5.763</c:v>
+                  <c:v>942</c:v>
                 </c:pt>
               </c:numCache>
             </c:numRef>
           </c:val>
         </c:ser>
+        <c:ser>
+          <c:idx val="2"/>
+          <c:order val="2"/>
+          <c:tx>
+            <c:strRef>
+              <c:f>Sheet1!$D$1</c:f>
+              <c:strCache>
+                <c:ptCount val="1"/>
+                <c:pt idx="0">
+                  <c:v>Stage 3</c:v>
+                </c:pt>
+              </c:strCache>
+            </c:strRef>
+          </c:tx>
+          <c:spPr>
+            <a:solidFill>
+              <a:srgbClr val="E34948"/>
+            </a:solidFill>
+            <a:ln w="19050">
+              <a:solidFill>
+                <a:srgbClr val="FFFFFF"/>
+              </a:solidFill>
+            </a:ln>
+          </c:spPr>
+          <c:dLbls>
+            <c:dLbl>
+              <c:idx val="0"/>
+              <c:layout>
+                <c:manualLayout>
+                  <c:x val="0.0000"/>
+                  <c:y val="0.0850"/>
+                </c:manualLayout>
+              </c:layout>
+              <c:tx>
+                <c:rich>
+                  <a:bodyPr/>
+                  <a:lstStyle/>
+                  <a:p>
+                    <a:r>
+                      <a:rPr sz="1100" b="1">
+                        <a:solidFill>
+                          <a:srgbClr val="1E2B3C"/>
+                        </a:solidFill>
+                      </a:rPr>
+                      <a:t>42</a:t>
+                    </a:r>
+                  </a:p>
+                </c:rich>
+              </c:tx>
+              <c:dLblPos val="ctr"/>
+              <c:showLegendKey val="0"/>
+              <c:showVal val="1"/>
+              <c:showCatName val="0"/>
+              <c:showSerName val="0"/>
+              <c:showPercent val="0"/>
+              <c:showBubbleSize val="0"/>
+            </c:dLbl>
+            <c:dLbl>
+              <c:idx val="1"/>
+              <c:tx>
+                <c:rich>
+                  <a:bodyPr/>
+                  <a:lstStyle/>
+                  <a:p>
+                    <a:r>
+                      <a:rPr sz="1100" b="1">
+                        <a:solidFill>
+                          <a:srgbClr val="FFFFFF"/>
+                        </a:solidFill>
+                      </a:rPr>
+                      <a:t>115</a:t>
+                    </a:r>
+                  </a:p>
+                </c:rich>
+              </c:tx>
+              <c:showLegendKey val="0"/>
+              <c:showVal val="1"/>
+              <c:showCatName val="0"/>
+              <c:showSerName val="0"/>
+              <c:showPercent val="0"/>
+              <c:showBubbleSize val="0"/>
+            </c:dLbl>
+            <c:dLbl>
+              <c:idx val="2"/>
+              <c:layout>
+                <c:manualLayout>
+                  <c:x val="0.0000"/>
+                  <c:y val="0.0850"/>
+                </c:manualLayout>
+              </c:layout>
+              <c:tx>
+                <c:rich>
+                  <a:bodyPr/>
+                  <a:lstStyle/>
+                  <a:p>
+                    <a:r>
+                      <a:rPr sz="1100" b="1">
+                        <a:solidFill>
+                          <a:srgbClr val="1E2B3C"/>
+                        </a:solidFill>
+                      </a:rPr>
+                      <a:t>46</a:t>
+                    </a:r>
+                  </a:p>
+                </c:rich>
+              </c:tx>
+              <c:dLblPos val="ctr"/>
+              <c:showLegendKey val="0"/>
+              <c:showVal val="1"/>
+              <c:showCatName val="0"/>
+              <c:showSerName val="0"/>
+              <c:showPercent val="0"/>
+              <c:showBubbleSize val="0"/>
+            </c:dLbl>
+            <c:dLbl>
+              <c:idx val="3"/>
+              <c:tx>
+                <c:rich>
+                  <a:bodyPr/>
+                  <a:lstStyle/>
+                  <a:p>
+                    <a:r>
+                      <a:rPr sz="1100" b="1">
+                        <a:solidFill>
+                          <a:srgbClr val="FFFFFF"/>
+                        </a:solidFill>
+                      </a:rPr>
+                      <a:t>140</a:t>
+                    </a:r>
+                  </a:p>
+                </c:rich>
+              </c:tx>
+              <c:showLegendKey val="0"/>
+              <c:showVal val="1"/>
+              <c:showCatName val="0"/>
+              <c:showSerName val="0"/>
+              <c:showPercent val="0"/>
+              <c:showBubbleSize val="0"/>
+            </c:dLbl>
+            <c:showLegendKey val="0"/>
+            <c:showVal val="0"/>
+            <c:showCatName val="0"/>
+            <c:showSerName val="0"/>
+            <c:showPercent val="0"/>
+            <c:showBubbleSize val="0"/>
+            <c:showLeaderLines val="1"/>
+          </c:dLbls>
+          <c:cat>
+            <c:strRef>
+              <c:f>Sheet1!$A$2:$A$5</c:f>
+              <c:strCache>
+                <c:ptCount val="4"/>
+                <c:pt idx="0">
+                  <c:v>PL36, stage 1 at 30 June</c:v>
+                </c:pt>
+                <c:pt idx="1">
+                  <c:v>PL36, stage 2 at 30 June</c:v>
+                </c:pt>
+                <c:pt idx="2">
+                  <c:v>PL60, stage 1 at 30 June</c:v>
+                </c:pt>
+                <c:pt idx="3">
+                  <c:v>PL60, stage 2 at 30 June</c:v>
+                </c:pt>
+              </c:strCache>
+            </c:strRef>
+          </c:cat>
+          <c:val>
+            <c:numRef>
+              <c:f>Sheet1!$D$2:$D$5</c:f>
+              <c:numCache>
+                <c:formatCode>General</c:formatCode>
+                <c:ptCount val="4"/>
+                <c:pt idx="0">
+                  <c:v>42</c:v>
+                </c:pt>
+                <c:pt idx="1">
+                  <c:v>115</c:v>
+                </c:pt>
+                <c:pt idx="2">
+                  <c:v>46</c:v>
+                </c:pt>
+                <c:pt idx="3">
+                  <c:v>140</c:v>
+                </c:pt>
+              </c:numCache>
+            </c:numRef>
+          </c:val>
+        </c:ser>
+        <c:ser>
+          <c:idx val="3"/>
+          <c:order val="3"/>
+          <c:tx>
+            <c:strRef>
+              <c:f>Sheet1!$E$1</c:f>
+              <c:strCache>
+                <c:ptCount val="1"/>
+                <c:pt idx="0">
+                  <c:v>Closed</c:v>
+                </c:pt>
+              </c:strCache>
+            </c:strRef>
+          </c:tx>
+          <c:spPr>
+            <a:solidFill>
+              <a:srgbClr val="6250D6"/>
+            </a:solidFill>
+            <a:ln w="19050">
+              <a:solidFill>
+                <a:srgbClr val="FFFFFF"/>
+              </a:solidFill>
+            </a:ln>
+          </c:spPr>
+          <c:dLbls>
+            <c:dLbl>
+              <c:idx val="0"/>
+              <c:tx>
+                <c:rich>
+                  <a:bodyPr/>
+                  <a:lstStyle/>
+                  <a:p>
+                    <a:r>
+                      <a:rPr sz="1100" b="1">
+                        <a:solidFill>
+                          <a:srgbClr val="FFFFFF"/>
+                        </a:solidFill>
+                      </a:rPr>
+                      <a:t>1,586</a:t>
+                    </a:r>
+                  </a:p>
+                </c:rich>
+              </c:tx>
+              <c:showLegendKey val="0"/>
+              <c:showVal val="1"/>
+              <c:showCatName val="0"/>
+              <c:showSerName val="0"/>
+              <c:showPercent val="0"/>
+              <c:showBubbleSize val="0"/>
+            </c:dLbl>
+            <c:dLbl>
+              <c:idx val="1"/>
+              <c:tx>
+                <c:rich>
+                  <a:bodyPr/>
+                  <a:lstStyle/>
+                  <a:p>
+                    <a:r>
+                      <a:rPr sz="1100" b="1">
+                        <a:solidFill>
+                          <a:srgbClr val="FFFFFF"/>
+                        </a:solidFill>
+                      </a:rPr>
+                      <a:t>123</a:t>
+                    </a:r>
+                  </a:p>
+                </c:rich>
+              </c:tx>
+              <c:showLegendKey val="0"/>
+              <c:showVal val="1"/>
+              <c:showCatName val="0"/>
+              <c:showSerName val="0"/>
+              <c:showPercent val="0"/>
+              <c:showBubbleSize val="0"/>
+            </c:dLbl>
+            <c:dLbl>
+              <c:idx val="2"/>
+              <c:tx>
+                <c:rich>
+                  <a:bodyPr/>
+                  <a:lstStyle/>
+                  <a:p>
+                    <a:r>
+                      <a:rPr sz="1100" b="1">
+                        <a:solidFill>
+                          <a:srgbClr val="FFFFFF"/>
+                        </a:solidFill>
+                      </a:rPr>
+                      <a:t>1,180</a:t>
+                    </a:r>
+                  </a:p>
+                </c:rich>
+              </c:tx>
+              <c:showLegendKey val="0"/>
+              <c:showVal val="1"/>
+              <c:showCatName val="0"/>
+              <c:showSerName val="0"/>
+              <c:showPercent val="0"/>
+              <c:showBubbleSize val="0"/>
+            </c:dLbl>
+            <c:dLbl>
+              <c:idx val="3"/>
+              <c:tx>
+                <c:rich>
+                  <a:bodyPr/>
+                  <a:lstStyle/>
+                  <a:p>
+                    <a:r>
+                      <a:rPr sz="1100" b="1">
+                        <a:solidFill>
+                          <a:srgbClr val="FFFFFF"/>
+                        </a:solidFill>
+                      </a:rPr>
+                      <a:t>112</a:t>
+                    </a:r>
+                  </a:p>
+                </c:rich>
+              </c:tx>
+              <c:showLegendKey val="0"/>
+              <c:showVal val="1"/>
+              <c:showCatName val="0"/>
+              <c:showSerName val="0"/>
+              <c:showPercent val="0"/>
+              <c:showBubbleSize val="0"/>
+            </c:dLbl>
+            <c:showLegendKey val="0"/>
+            <c:showVal val="0"/>
+            <c:showCatName val="0"/>
+            <c:showSerName val="0"/>
+            <c:showPercent val="0"/>
+            <c:showBubbleSize val="0"/>
+            <c:showLeaderLines val="1"/>
+          </c:dLbls>
+          <c:cat>
+            <c:strRef>
+              <c:f>Sheet1!$A$2:$A$5</c:f>
+              <c:strCache>
+                <c:ptCount val="4"/>
+                <c:pt idx="0">
+                  <c:v>PL36, stage 1 at 30 June</c:v>
+                </c:pt>
+                <c:pt idx="1">
+                  <c:v>PL36, stage 2 at 30 June</c:v>
+                </c:pt>
+                <c:pt idx="2">
+                  <c:v>PL60, stage 1 at 30 June</c:v>
+                </c:pt>
+                <c:pt idx="3">
+                  <c:v>PL60, stage 2 at 30 June</c:v>
+                </c:pt>
+              </c:strCache>
+            </c:strRef>
+          </c:cat>
+          <c:val>
+            <c:numRef>
+              <c:f>Sheet1!$E$2:$E$5</c:f>
+              <c:numCache>
+                <c:formatCode>General</c:formatCode>
+                <c:ptCount val="4"/>
+                <c:pt idx="0">
+                  <c:v>1586</c:v>
+                </c:pt>
+                <c:pt idx="1">
+                  <c:v>123</c:v>
+                </c:pt>
+                <c:pt idx="2">
+                  <c:v>1180</c:v>
+                </c:pt>
+                <c:pt idx="3">
+                  <c:v>112</c:v>
+                </c:pt>
+              </c:numCache>
+            </c:numRef>
+          </c:val>
+        </c:ser>
+        <c:gapWidth val="55"/>
+        <c:overlap val="100"/>
         <c:axId val="-2068027336"/>
         <c:axId val="-2113994440"/>
       </c:barChart>
       <c:catAx>
         <c:axId val="-2068027336"/>
         <c:scaling>
-          <c:orientation val="minMax"/>
+          <c:orientation val="maxMin"/>
         </c:scaling>
         <c:delete val="0"/>
-        <c:axPos val="b"/>
+        <c:axPos val="l"/>
         <c:majorTickMark val="out"/>
         <c:minorTickMark val="none"/>
         <c:tickLblPos val="nextTo"/>
@@ -450,7 +851,7 @@
           <a:lstStyle/>
           <a:p>
             <a:pPr>
-              <a:defRPr sz="1200"/>
+              <a:defRPr sz="1100"/>
             </a:pPr>
           </a:p>
         </c:txPr>
@@ -465,9 +866,8 @@
         <c:axId val="-2113994440"/>
         <c:scaling/>
         <c:delete val="0"/>
-        <c:axPos val="l"/>
-        <c:majorGridlines/>
-        <c:numFmt formatCode="&quot;$&quot;0.0&quot;m&quot;" sourceLinked="0"/>
+        <c:axPos val="b"/>
+        <c:numFmt formatCode="0%" sourceLinked="0"/>
         <c:majorTickMark val="out"/>
         <c:minorTickMark val="none"/>
         <c:tickLblPos val="nextTo"/>
@@ -476,7 +876,7 @@
           <a:lstStyle/>
           <a:p>
             <a:pPr>
-              <a:defRPr sz="1100"/>
+              <a:defRPr sz="1000"/>
             </a:pPr>
           </a:p>
         </c:txPr>
@@ -487,6 +887,15 @@
     <c:legend>
       <c:legendPos val="t"/>
       <c:overlay val="0"/>
+      <c:txPr>
+        <a:bodyPr/>
+        <a:lstStyle/>
+        <a:p>
+          <a:pPr>
+            <a:defRPr sz="1100"/>
+          </a:pPr>
+        </a:p>
+      </c:txPr>
     </c:legend>
     <c:dispBlanksAs val="gap"/>
   </c:chart>
@@ -3515,7 +3924,7 @@
                   <a:srgbClr val="1E2B3C"/>
                 </a:solidFill>
               </a:rPr>
-              <a:t>Book a collective ECL allowance of $13,773,000 on personal loans at 30 September 2026</a:t>
+              <a:t>Book a collective ECL allowance of $13,160,000 at 30 September 2026</a:t>
             </a:r>
           </a:p>
           <a:p>
@@ -3525,7 +3934,7 @@
                   <a:srgbClr val="5B6670"/>
                 </a:solidFill>
               </a:rPr>
-              <a:t>Stage 1 $10,933,000, stage 2 $2,840,000; 343 loans in stage 3 sit outside the collective model</a:t>
+              <a:t>Stage 1 $10,563,000 and stage 2 $2,597,000; 343 loans in stage 3 are assessed separately under CRM-ECL-06</a:t>
             </a:r>
           </a:p>
         </p:txBody>
@@ -3539,8 +3948,8 @@
           <p:nvPr/>
         </p:nvGraphicFramePr>
         <p:xfrm>
-          <a:off x="576000" y="1872000"/>
-          <a:ext cx="10980000" cy="2520000"/>
+          <a:off x="576000" y="1944000"/>
+          <a:ext cx="6839999" cy="1872000"/>
         </p:xfrm>
         <a:graphic>
           <a:graphicData uri="http://schemas.openxmlformats.org/drawingml/2006/table">
@@ -3549,47 +3958,23 @@
                 <a:tableStyleId>{5C22544A-7EE6-4342-B048-85BDC9FD1C3A}</a:tableStyleId>
               </a:tblPr>
               <a:tblGrid>
-                <a:gridCol w="1296000"/>
-                <a:gridCol w="1296000"/>
-                <a:gridCol w="1512000"/>
-                <a:gridCol w="2664000"/>
-                <a:gridCol w="2304000"/>
-                <a:gridCol w="1908000"/>
+                <a:gridCol w="3096000"/>
+                <a:gridCol w="1655999"/>
+                <a:gridCol w="2088000"/>
               </a:tblGrid>
-              <a:tr h="504000">
+              <a:tr h="468000">
                 <a:tc>
                   <a:txBody>
                     <a:bodyPr/>
                     <a:lstStyle/>
                     <a:p>
                       <a:r>
-                        <a:rPr sz="1400" b="1">
+                        <a:rPr sz="1600" b="1">
                           <a:solidFill>
                             <a:srgbClr val="FFFFFF"/>
                           </a:solidFill>
                         </a:rPr>
-                        <a:t>Stage</a:t>
-                      </a:r>
-                    </a:p>
-                  </a:txBody>
-                  <a:tcPr>
-                    <a:solidFill>
-                      <a:srgbClr val="1E2B3C"/>
-                    </a:solidFill>
-                  </a:tcPr>
-                </a:tc>
-                <a:tc>
-                  <a:txBody>
-                    <a:bodyPr/>
-                    <a:lstStyle/>
-                    <a:p>
-                      <a:r>
-                        <a:rPr sz="1400" b="1">
-                          <a:solidFill>
-                            <a:srgbClr val="FFFFFF"/>
-                          </a:solidFill>
-                        </a:rPr>
-                        <a:t>Product</a:t>
+                        <a:t/>
                       </a:r>
                     </a:p>
                   </a:txBody>
@@ -3606,7 +3991,7 @@
                     <a:p>
                       <a:pPr algn="r"/>
                       <a:r>
-                        <a:rPr sz="1400" b="1">
+                        <a:rPr sz="1600" b="1">
                           <a:solidFill>
                             <a:srgbClr val="FFFFFF"/>
                           </a:solidFill>
@@ -3628,29 +4013,7 @@
                     <a:p>
                       <a:pPr algn="r"/>
                       <a:r>
-                        <a:rPr sz="1400" b="1">
-                          <a:solidFill>
-                            <a:srgbClr val="FFFFFF"/>
-                          </a:solidFill>
-                        </a:rPr>
-                        <a:t>Gross carrying amount</a:t>
-                      </a:r>
-                    </a:p>
-                  </a:txBody>
-                  <a:tcPr>
-                    <a:solidFill>
-                      <a:srgbClr val="1E2B3C"/>
-                    </a:solidFill>
-                  </a:tcPr>
-                </a:tc>
-                <a:tc>
-                  <a:txBody>
-                    <a:bodyPr/>
-                    <a:lstStyle/>
-                    <a:p>
-                      <a:pPr algn="r"/>
-                      <a:r>
-                        <a:rPr sz="1400" b="1">
+                        <a:rPr sz="1600" b="1">
                           <a:solidFill>
                             <a:srgbClr val="FFFFFF"/>
                           </a:solidFill>
@@ -3665,37 +4028,15 @@
                     </a:solidFill>
                   </a:tcPr>
                 </a:tc>
-                <a:tc>
-                  <a:txBody>
-                    <a:bodyPr/>
-                    <a:lstStyle/>
-                    <a:p>
-                      <a:pPr algn="r"/>
-                      <a:r>
-                        <a:rPr sz="1400" b="1">
-                          <a:solidFill>
-                            <a:srgbClr val="FFFFFF"/>
-                          </a:solidFill>
-                        </a:rPr>
-                        <a:t>Coverage</a:t>
-                      </a:r>
-                    </a:p>
-                  </a:txBody>
-                  <a:tcPr>
-                    <a:solidFill>
-                      <a:srgbClr val="1E2B3C"/>
-                    </a:solidFill>
-                  </a:tcPr>
-                </a:tc>
               </a:tr>
-              <a:tr h="504000">
+              <a:tr h="468000">
                 <a:tc>
                   <a:txBody>
                     <a:bodyPr/>
                     <a:lstStyle/>
                     <a:p>
                       <a:r>
-                        <a:rPr sz="1400" b="0">
+                        <a:rPr sz="1600" b="0">
                           <a:solidFill>
                             <a:srgbClr val="1E2B3C"/>
                           </a:solidFill>
@@ -3715,13 +4056,14 @@
                     <a:bodyPr/>
                     <a:lstStyle/>
                     <a:p>
+                      <a:pPr algn="r"/>
                       <a:r>
-                        <a:rPr sz="1400" b="0">
+                        <a:rPr sz="1600" b="0">
                           <a:solidFill>
                             <a:srgbClr val="1E2B3C"/>
                           </a:solidFill>
                         </a:rPr>
-                        <a:t>PL36</a:t>
+                        <a:t>37,288</a:t>
                       </a:r>
                     </a:p>
                   </a:txBody>
@@ -3738,78 +4080,12 @@
                     <a:p>
                       <a:pPr algn="r"/>
                       <a:r>
-                        <a:rPr sz="1400" b="0">
+                        <a:rPr sz="1600" b="0">
                           <a:solidFill>
                             <a:srgbClr val="1E2B3C"/>
                           </a:solidFill>
                         </a:rPr>
-                        <a:t>17,109</a:t>
-                      </a:r>
-                    </a:p>
-                  </a:txBody>
-                  <a:tcPr>
-                    <a:solidFill>
-                      <a:srgbClr val="FFFFFF"/>
-                    </a:solidFill>
-                  </a:tcPr>
-                </a:tc>
-                <a:tc>
-                  <a:txBody>
-                    <a:bodyPr/>
-                    <a:lstStyle/>
-                    <a:p>
-                      <a:pPr algn="r"/>
-                      <a:r>
-                        <a:rPr sz="1400" b="0">
-                          <a:solidFill>
-                            <a:srgbClr val="1E2B3C"/>
-                          </a:solidFill>
-                        </a:rPr>
-                        <a:t>$138,349,000</a:t>
-                      </a:r>
-                    </a:p>
-                  </a:txBody>
-                  <a:tcPr>
-                    <a:solidFill>
-                      <a:srgbClr val="FFFFFF"/>
-                    </a:solidFill>
-                  </a:tcPr>
-                </a:tc>
-                <a:tc>
-                  <a:txBody>
-                    <a:bodyPr/>
-                    <a:lstStyle/>
-                    <a:p>
-                      <a:pPr algn="r"/>
-                      <a:r>
-                        <a:rPr sz="1400" b="0">
-                          <a:solidFill>
-                            <a:srgbClr val="1E2B3C"/>
-                          </a:solidFill>
-                        </a:rPr>
-                        <a:t>$3,202,000</a:t>
-                      </a:r>
-                    </a:p>
-                  </a:txBody>
-                  <a:tcPr>
-                    <a:solidFill>
-                      <a:srgbClr val="FFFFFF"/>
-                    </a:solidFill>
-                  </a:tcPr>
-                </a:tc>
-                <a:tc>
-                  <a:txBody>
-                    <a:bodyPr/>
-                    <a:lstStyle/>
-                    <a:p>
-                      <a:pPr algn="r"/>
-                      <a:r>
-                        <a:rPr sz="1400" b="0">
-                          <a:solidFill>
-                            <a:srgbClr val="1E2B3C"/>
-                          </a:solidFill>
-                        </a:rPr>
-                        <a:t>2.31%</a:t>
+                        <a:t>$10,563,000</a:t>
                       </a:r>
                     </a:p>
                   </a:txBody>
@@ -3820,146 +4096,14 @@
                   </a:tcPr>
                 </a:tc>
               </a:tr>
-              <a:tr h="504000">
+              <a:tr h="468000">
                 <a:tc>
                   <a:txBody>
                     <a:bodyPr/>
                     <a:lstStyle/>
                     <a:p>
                       <a:r>
-                        <a:rPr sz="1400" b="0">
-                          <a:solidFill>
-                            <a:srgbClr val="1E2B3C"/>
-                          </a:solidFill>
-                        </a:rPr>
-                        <a:t>Stage 1</a:t>
-                      </a:r>
-                    </a:p>
-                  </a:txBody>
-                  <a:tcPr>
-                    <a:solidFill>
-                      <a:srgbClr val="F3F5F7"/>
-                    </a:solidFill>
-                  </a:tcPr>
-                </a:tc>
-                <a:tc>
-                  <a:txBody>
-                    <a:bodyPr/>
-                    <a:lstStyle/>
-                    <a:p>
-                      <a:r>
-                        <a:rPr sz="1400" b="0">
-                          <a:solidFill>
-                            <a:srgbClr val="1E2B3C"/>
-                          </a:solidFill>
-                        </a:rPr>
-                        <a:t>PL60</a:t>
-                      </a:r>
-                    </a:p>
-                  </a:txBody>
-                  <a:tcPr>
-                    <a:solidFill>
-                      <a:srgbClr val="F3F5F7"/>
-                    </a:solidFill>
-                  </a:tcPr>
-                </a:tc>
-                <a:tc>
-                  <a:txBody>
-                    <a:bodyPr/>
-                    <a:lstStyle/>
-                    <a:p>
-                      <a:pPr algn="r"/>
-                      <a:r>
-                        <a:rPr sz="1400" b="0">
-                          <a:solidFill>
-                            <a:srgbClr val="1E2B3C"/>
-                          </a:solidFill>
-                        </a:rPr>
-                        <a:t>20,180</a:t>
-                      </a:r>
-                    </a:p>
-                  </a:txBody>
-                  <a:tcPr>
-                    <a:solidFill>
-                      <a:srgbClr val="F3F5F7"/>
-                    </a:solidFill>
-                  </a:tcPr>
-                </a:tc>
-                <a:tc>
-                  <a:txBody>
-                    <a:bodyPr/>
-                    <a:lstStyle/>
-                    <a:p>
-                      <a:pPr algn="r"/>
-                      <a:r>
-                        <a:rPr sz="1400" b="0">
-                          <a:solidFill>
-                            <a:srgbClr val="1E2B3C"/>
-                          </a:solidFill>
-                        </a:rPr>
-                        <a:t>$330,436,000</a:t>
-                      </a:r>
-                    </a:p>
-                  </a:txBody>
-                  <a:tcPr>
-                    <a:solidFill>
-                      <a:srgbClr val="F3F5F7"/>
-                    </a:solidFill>
-                  </a:tcPr>
-                </a:tc>
-                <a:tc>
-                  <a:txBody>
-                    <a:bodyPr/>
-                    <a:lstStyle/>
-                    <a:p>
-                      <a:pPr algn="r"/>
-                      <a:r>
-                        <a:rPr sz="1400" b="0">
-                          <a:solidFill>
-                            <a:srgbClr val="1E2B3C"/>
-                          </a:solidFill>
-                        </a:rPr>
-                        <a:t>$7,731,000</a:t>
-                      </a:r>
-                    </a:p>
-                  </a:txBody>
-                  <a:tcPr>
-                    <a:solidFill>
-                      <a:srgbClr val="F3F5F7"/>
-                    </a:solidFill>
-                  </a:tcPr>
-                </a:tc>
-                <a:tc>
-                  <a:txBody>
-                    <a:bodyPr/>
-                    <a:lstStyle/>
-                    <a:p>
-                      <a:pPr algn="r"/>
-                      <a:r>
-                        <a:rPr sz="1400" b="0">
-                          <a:solidFill>
-                            <a:srgbClr val="1E2B3C"/>
-                          </a:solidFill>
-                        </a:rPr>
-                        <a:t>2.34%</a:t>
-                      </a:r>
-                    </a:p>
-                  </a:txBody>
-                  <a:tcPr>
-                    <a:solidFill>
-                      <a:srgbClr val="F3F5F7"/>
-                    </a:solidFill>
-                  </a:tcPr>
-                </a:tc>
-              </a:tr>
-              <a:tr h="504000">
-                <a:tc>
-                  <a:txBody>
-                    <a:bodyPr/>
-                    <a:lstStyle/>
-                    <a:p>
-                      <a:r>
-                        <a:rPr sz="1400" b="0">
+                        <a:rPr sz="1600" b="0">
                           <a:solidFill>
                             <a:srgbClr val="1E2B3C"/>
                           </a:solidFill>
@@ -3979,13 +4123,14 @@
                     <a:bodyPr/>
                     <a:lstStyle/>
                     <a:p>
+                      <a:pPr algn="r"/>
                       <a:r>
-                        <a:rPr sz="1400" b="0">
+                        <a:rPr sz="1600" b="0">
                           <a:solidFill>
                             <a:srgbClr val="1E2B3C"/>
                           </a:solidFill>
                         </a:rPr>
-                        <a:t>PL36</a:t>
+                        <a:t>3,266</a:t>
                       </a:r>
                     </a:p>
                   </a:txBody>
@@ -4002,18 +4147,41 @@
                     <a:p>
                       <a:pPr algn="r"/>
                       <a:r>
-                        <a:rPr sz="1400" b="0">
+                        <a:rPr sz="1600" b="0">
                           <a:solidFill>
                             <a:srgbClr val="1E2B3C"/>
                           </a:solidFill>
                         </a:rPr>
-                        <a:t>1,421</a:t>
+                        <a:t>$2,597,000</a:t>
                       </a:r>
                     </a:p>
                   </a:txBody>
                   <a:tcPr>
                     <a:solidFill>
                       <a:srgbClr val="FFFFFF"/>
+                    </a:solidFill>
+                  </a:tcPr>
+                </a:tc>
+              </a:tr>
+              <a:tr h="468000">
+                <a:tc>
+                  <a:txBody>
+                    <a:bodyPr/>
+                    <a:lstStyle/>
+                    <a:p>
+                      <a:r>
+                        <a:rPr sz="1600" b="1">
+                          <a:solidFill>
+                            <a:srgbClr val="1E2B3C"/>
+                          </a:solidFill>
+                        </a:rPr>
+                        <a:t>Collective allowance</a:t>
+                      </a:r>
+                    </a:p>
+                  </a:txBody>
+                  <a:tcPr>
+                    <a:solidFill>
+                      <a:srgbClr val="EEF1F4"/>
                     </a:solidFill>
                   </a:tcPr>
                 </a:tc>
@@ -4024,18 +4192,18 @@
                     <a:p>
                       <a:pPr algn="r"/>
                       <a:r>
-                        <a:rPr sz="1400" b="0">
+                        <a:rPr sz="1600" b="1">
                           <a:solidFill>
                             <a:srgbClr val="1E2B3C"/>
                           </a:solidFill>
                         </a:rPr>
-                        <a:t>$11,728,000</a:t>
+                        <a:t>40,554</a:t>
                       </a:r>
                     </a:p>
                   </a:txBody>
                   <a:tcPr>
                     <a:solidFill>
-                      <a:srgbClr val="FFFFFF"/>
+                      <a:srgbClr val="EEF1F4"/>
                     </a:solidFill>
                   </a:tcPr>
                 </a:tc>
@@ -4046,172 +4214,18 @@
                     <a:p>
                       <a:pPr algn="r"/>
                       <a:r>
-                        <a:rPr sz="1400" b="0">
+                        <a:rPr sz="1600" b="1">
                           <a:solidFill>
                             <a:srgbClr val="1E2B3C"/>
                           </a:solidFill>
                         </a:rPr>
-                        <a:t>$681,000</a:t>
+                        <a:t>$13,160,000</a:t>
                       </a:r>
                     </a:p>
                   </a:txBody>
                   <a:tcPr>
                     <a:solidFill>
-                      <a:srgbClr val="FFFFFF"/>
-                    </a:solidFill>
-                  </a:tcPr>
-                </a:tc>
-                <a:tc>
-                  <a:txBody>
-                    <a:bodyPr/>
-                    <a:lstStyle/>
-                    <a:p>
-                      <a:pPr algn="r"/>
-                      <a:r>
-                        <a:rPr sz="1400" b="0">
-                          <a:solidFill>
-                            <a:srgbClr val="1E2B3C"/>
-                          </a:solidFill>
-                        </a:rPr>
-                        <a:t>5.81%</a:t>
-                      </a:r>
-                    </a:p>
-                  </a:txBody>
-                  <a:tcPr>
-                    <a:solidFill>
-                      <a:srgbClr val="FFFFFF"/>
-                    </a:solidFill>
-                  </a:tcPr>
-                </a:tc>
-              </a:tr>
-              <a:tr h="504000">
-                <a:tc>
-                  <a:txBody>
-                    <a:bodyPr/>
-                    <a:lstStyle/>
-                    <a:p>
-                      <a:r>
-                        <a:rPr sz="1400" b="0">
-                          <a:solidFill>
-                            <a:srgbClr val="1E2B3C"/>
-                          </a:solidFill>
-                        </a:rPr>
-                        <a:t>Stage 2</a:t>
-                      </a:r>
-                    </a:p>
-                  </a:txBody>
-                  <a:tcPr>
-                    <a:solidFill>
-                      <a:srgbClr val="F3F5F7"/>
-                    </a:solidFill>
-                  </a:tcPr>
-                </a:tc>
-                <a:tc>
-                  <a:txBody>
-                    <a:bodyPr/>
-                    <a:lstStyle/>
-                    <a:p>
-                      <a:r>
-                        <a:rPr sz="1400" b="0">
-                          <a:solidFill>
-                            <a:srgbClr val="1E2B3C"/>
-                          </a:solidFill>
-                        </a:rPr>
-                        <a:t>PL60</a:t>
-                      </a:r>
-                    </a:p>
-                  </a:txBody>
-                  <a:tcPr>
-                    <a:solidFill>
-                      <a:srgbClr val="F3F5F7"/>
-                    </a:solidFill>
-                  </a:tcPr>
-                </a:tc>
-                <a:tc>
-                  <a:txBody>
-                    <a:bodyPr/>
-                    <a:lstStyle/>
-                    <a:p>
-                      <a:pPr algn="r"/>
-                      <a:r>
-                        <a:rPr sz="1400" b="0">
-                          <a:solidFill>
-                            <a:srgbClr val="1E2B3C"/>
-                          </a:solidFill>
-                        </a:rPr>
-                        <a:t>1,844</a:t>
-                      </a:r>
-                    </a:p>
-                  </a:txBody>
-                  <a:tcPr>
-                    <a:solidFill>
-                      <a:srgbClr val="F3F5F7"/>
-                    </a:solidFill>
-                  </a:tcPr>
-                </a:tc>
-                <a:tc>
-                  <a:txBody>
-                    <a:bodyPr/>
-                    <a:lstStyle/>
-                    <a:p>
-                      <a:pPr algn="r"/>
-                      <a:r>
-                        <a:rPr sz="1400" b="0">
-                          <a:solidFill>
-                            <a:srgbClr val="1E2B3C"/>
-                          </a:solidFill>
-                        </a:rPr>
-                        <a:t>$28,735,000</a:t>
-                      </a:r>
-                    </a:p>
-                  </a:txBody>
-                  <a:tcPr>
-                    <a:solidFill>
-                      <a:srgbClr val="F3F5F7"/>
-                    </a:solidFill>
-                  </a:tcPr>
-                </a:tc>
-                <a:tc>
-                  <a:txBody>
-                    <a:bodyPr/>
-                    <a:lstStyle/>
-                    <a:p>
-                      <a:pPr algn="r"/>
-                      <a:r>
-                        <a:rPr sz="1400" b="0">
-                          <a:solidFill>
-                            <a:srgbClr val="1E2B3C"/>
-                          </a:solidFill>
-                        </a:rPr>
-                        <a:t>$2,159,000</a:t>
-                      </a:r>
-                    </a:p>
-                  </a:txBody>
-                  <a:tcPr>
-                    <a:solidFill>
-                      <a:srgbClr val="F3F5F7"/>
-                    </a:solidFill>
-                  </a:tcPr>
-                </a:tc>
-                <a:tc>
-                  <a:txBody>
-                    <a:bodyPr/>
-                    <a:lstStyle/>
-                    <a:p>
-                      <a:pPr algn="r"/>
-                      <a:r>
-                        <a:rPr sz="1400" b="0">
-                          <a:solidFill>
-                            <a:srgbClr val="1E2B3C"/>
-                          </a:solidFill>
-                        </a:rPr>
-                        <a:t>7.51%</a:t>
-                      </a:r>
-                    </a:p>
-                  </a:txBody>
-                  <a:tcPr>
-                    <a:solidFill>
-                      <a:srgbClr val="F3F5F7"/>
+                      <a:srgbClr val="EEF1F4"/>
                     </a:solidFill>
                   </a:tcPr>
                 </a:tc>
@@ -4228,8 +4242,8 @@
         </p:nvSpPr>
         <p:spPr>
           <a:xfrm>
-            <a:off x="576000" y="4680000"/>
-            <a:ext cx="10980000" cy="1260000"/>
+            <a:off x="576000" y="4176000"/>
+            <a:ext cx="10980000" cy="1440000"/>
           </a:xfrm>
           <a:prstGeom prst="rect">
             <a:avLst/>
@@ -4243,12 +4257,12 @@
           <a:lstStyle/>
           <a:p>
             <a:r>
-              <a:rPr sz="1100">
+              <a:rPr sz="1200">
                 <a:solidFill>
                   <a:srgbClr val="5B6670"/>
                 </a:solidFill>
               </a:rPr>
-              <a:t>Probability of default is read from the PLPD-2026.06 curve from each loan's months on book at the reporting date, conditional on the loan still performing, with the 2.4 stage 2 scalar; scenarios weighted 55 / 30 / 15 per cent (multiplier 1.0600). Amounts to the nearest thousand dollars.</a:t>
+              <a:t>Each performing loan's monthly default probability comes from the PLPD-2026.06 curve from its months on book, conditioned on the share of the development loans still open and not in default at that point; stage 2 carries the 2.4 scalar and the scenarios are weighted 55 / 30 / 15 per cent (multiplier 1.06). Amounts to the nearest thousand dollars.</a:t>
             </a:r>
           </a:p>
         </p:txBody>
@@ -4256,6 +4270,39 @@
       <p:sp>
         <p:nvSpPr>
           <p:cNvPr id="5" name="TextBox 4"/>
+          <p:cNvSpPr txBox="1"/>
+          <p:nvPr/>
+        </p:nvSpPr>
+        <p:spPr>
+          <a:xfrm>
+            <a:off x="576000" y="6048000"/>
+            <a:ext cx="10980000" cy="288000"/>
+          </a:xfrm>
+          <a:prstGeom prst="rect">
+            <a:avLst/>
+          </a:prstGeom>
+          <a:noFill/>
+        </p:spPr>
+        <p:txBody>
+          <a:bodyPr wrap="none">
+            <a:spAutoFit/>
+          </a:bodyPr>
+          <a:lstStyle/>
+          <a:p>
+            <a:r>
+              <a:rPr sz="900">
+                <a:solidFill>
+                  <a:srgbClr val="5B6670"/>
+                </a:solidFill>
+              </a:rPr>
+              <a:t>Source: loan system extract at 30 September 2026; PLPD-2026.06 curve; scenarios approved 18 September 2026</a:t>
+            </a:r>
+          </a:p>
+        </p:txBody>
+      </p:sp>
+      <p:sp>
+        <p:nvSpPr>
+          <p:cNvPr id="6" name="TextBox 5"/>
           <p:cNvSpPr txBox="1"/>
           <p:nvPr/>
         </p:nvSpPr>
@@ -4332,7 +4379,7 @@
                   <a:srgbClr val="1E2B3C"/>
                 </a:solidFill>
               </a:rPr>
-              <a:t>2026 PL60 lending carries the largest share of the allowance, $5,763,000</a:t>
+              <a:t>1,599 stage 1 loans moved to stage 2 or 3 this quarter and 1,028 stage 2 loans returned to stage 1</a:t>
             </a:r>
           </a:p>
           <a:p>
@@ -4342,7 +4389,7 @@
                   <a:srgbClr val="5B6670"/>
                 </a:solidFill>
               </a:rPr>
-              <a:t>Collective ECL allowance by drawdown year and product, AUD, 30 September 2026</a:t>
+              <a:t>Loans in stage 1 or stage 2 at 30 June 2026, by where they stand at 30 September 2026</a:t>
             </a:r>
           </a:p>
         </p:txBody>
@@ -4356,8 +4403,8 @@
           <p:nvPr/>
         </p:nvGraphicFramePr>
         <p:xfrm>
-          <a:off x="576000" y="1655999"/>
-          <a:ext cx="10980000" cy="4500000"/>
+          <a:off x="576000" y="1584000"/>
+          <a:ext cx="10980000" cy="4428000"/>
         </p:xfrm>
         <a:graphic>
           <a:graphicData uri="http://schemas.openxmlformats.org/drawingml/2006/chart">
@@ -4368,6 +4415,39 @@
       <p:sp>
         <p:nvSpPr>
           <p:cNvPr id="4" name="TextBox 3"/>
+          <p:cNvSpPr txBox="1"/>
+          <p:nvPr/>
+        </p:nvSpPr>
+        <p:spPr>
+          <a:xfrm>
+            <a:off x="576000" y="6048000"/>
+            <a:ext cx="10980000" cy="288000"/>
+          </a:xfrm>
+          <a:prstGeom prst="rect">
+            <a:avLst/>
+          </a:prstGeom>
+          <a:noFill/>
+        </p:spPr>
+        <p:txBody>
+          <a:bodyPr wrap="none">
+            <a:spAutoFit/>
+          </a:bodyPr>
+          <a:lstStyle/>
+          <a:p>
+            <a:r>
+              <a:rPr sz="900">
+                <a:solidFill>
+                  <a:srgbClr val="5B6670"/>
+                </a:solidFill>
+              </a:rPr>
+              <a:t>Source: loan system extracts at 30 June and 30 September 2026; June month-end scoring run (1 July); hardship register at 30 September. Stages under CRM-ECL-04 section 2; closed = repaid, settled or written off.</a:t>
+            </a:r>
+          </a:p>
+        </p:txBody>
+      </p:sp>
+      <p:sp>
+        <p:nvSpPr>
+          <p:cNvPr id="5" name="TextBox 4"/>
           <p:cNvSpPr txBox="1"/>
           <p:nvPr/>
         </p:nvSpPr>

--- a/task133/golden/board_ecl_q3_2026.pptx
+++ b/task133/golden/board_ecl_q3_2026.pptx
@@ -3924,7 +3924,7 @@
                   <a:srgbClr val="1E2B3C"/>
                 </a:solidFill>
               </a:rPr>
-              <a:t>Book a collective ECL allowance of $13,160,000 at 30 September 2026</a:t>
+              <a:t>Book a collective ECL allowance of $13.2 million at 30 September 2026</a:t>
             </a:r>
           </a:p>
           <a:p>
@@ -3934,7 +3934,7 @@
                   <a:srgbClr val="5B6670"/>
                 </a:solidFill>
               </a:rPr>
-              <a:t>Stage 1 $10,563,000 and stage 2 $2,597,000; 343 loans in stage 3 are assessed separately under CRM-ECL-06</a:t>
+              <a:t>Stage 1 $10.6 million and stage 2 $2.6 million; 343 loans in stage 3 are assessed separately under CRM-ECL-06</a:t>
             </a:r>
           </a:p>
         </p:txBody>
@@ -4085,7 +4085,7 @@
                             <a:srgbClr val="1E2B3C"/>
                           </a:solidFill>
                         </a:rPr>
-                        <a:t>$10,563,000</a:t>
+                        <a:t>$10.6 million</a:t>
                       </a:r>
                     </a:p>
                   </a:txBody>
@@ -4152,7 +4152,7 @@
                             <a:srgbClr val="1E2B3C"/>
                           </a:solidFill>
                         </a:rPr>
-                        <a:t>$2,597,000</a:t>
+                        <a:t>$2.6 million</a:t>
                       </a:r>
                     </a:p>
                   </a:txBody>
@@ -4219,7 +4219,7 @@
                             <a:srgbClr val="1E2B3C"/>
                           </a:solidFill>
                         </a:rPr>
-                        <a:t>$13,160,000</a:t>
+                        <a:t>$13.2 million</a:t>
                       </a:r>
                     </a:p>
                   </a:txBody>
@@ -4262,7 +4262,7 @@
                   <a:srgbClr val="5B6670"/>
                 </a:solidFill>
               </a:rPr>
-              <a:t>Each performing loan's monthly default probability comes from the PLPD-2026.06 curve from its months on book, conditioned on the share of the development loans still open and not in default at that point; stage 2 carries the 2.4 scalar and the scenarios are weighted 55 / 30 / 15 per cent (multiplier 1.06). Amounts to the nearest thousand dollars.</a:t>
+              <a:t>Each performing loan's monthly default probability is read from its product's default and repayment rates by month on book in the loan record, counting the loans taken over at the 2019 go-live only from then; stage 2 carries the 2.4 scalar and the scenarios are weighted 55 / 30 / 15 per cent (multiplier 1.06). Amounts in AUD million.</a:t>
             </a:r>
           </a:p>
         </p:txBody>
@@ -4295,7 +4295,7 @@
                   <a:srgbClr val="5B6670"/>
                 </a:solidFill>
               </a:rPr>
-              <a:t>Source: loan system extract at 30 September 2026; PLPD-2026.06 curve; scenarios approved 18 September 2026</a:t>
+              <a:t>Source: loan system extract and loan record at 30 September 2026; scenarios approved 18 September 2026</a:t>
             </a:r>
           </a:p>
         </p:txBody>
